--- a/content/Lectures/Semester 1/Week 07 - Flow Shop and Job Shop Scheduling/5 Source Files/Week 7 - Flow Shop Scheduling.pptx
+++ b/content/Lectures/Semester 1/Week 07 - Flow Shop and Job Shop Scheduling/5 Source Files/Week 7 - Flow Shop Scheduling.pptx
@@ -11002,7 +11002,7 @@
             </a:r>
             <a:r>
               <a:rPr lang="en-GB" dirty="0"/>
-              <a:t> is the total time required to completed all jobs</a:t>
+              <a:t> is the total time required to complete all jobs</a:t>
             </a:r>
           </a:p>
         </p:txBody>
@@ -11202,7 +11202,7 @@
             </a:r>
             <a:r>
               <a:rPr lang="en-GB" dirty="0"/>
-              <a:t>problems</a:t>
+              <a:t>problems (in general, from 3 machines on)</a:t>
             </a:r>
           </a:p>
           <a:p>
@@ -11211,7 +11211,7 @@
             </a:pPr>
             <a:r>
               <a:rPr lang="en-GB" dirty="0"/>
-              <a:t>How many possible permutations. No repetitions and order matters!</a:t>
+              <a:t>How many possible permutations? No repetitions and order matters!</a:t>
             </a:r>
           </a:p>
           <a:p>
@@ -13259,7 +13259,7 @@
             </a:pPr>
             <a:r>
               <a:rPr lang="en-GB" dirty="0"/>
-              <a:t>Everything else is in NP</a:t>
+              <a:t>Everything else is NP-hard</a:t>
             </a:r>
           </a:p>
           <a:p>
@@ -16001,7 +16001,7 @@
                 </a:r>
                 <a:r>
                   <a:rPr lang="en-GB" dirty="0"/>
-                  <a:t>– Total time jobs are waiting in the queue and take to be processed.</a:t>
+                  <a:t>– the time at which a job is finished: its waiting time in the queue plus its own processing time.</a:t>
                 </a:r>
               </a:p>
               <a:p>
@@ -18067,7 +18067,7 @@
             <a:pPr lvl="1"/>
             <a:r>
               <a:rPr lang="en-GB" dirty="0"/>
-              <a:t>Often named the method/approach of Campbell Dudek and Smith</a:t>
+              <a:t>Often named the method/approach of Campbell, Dudek and Smith</a:t>
             </a:r>
           </a:p>
           <a:p>
@@ -19273,7 +19273,7 @@
                         <a:rPr lang="en-GB" b="0" i="1" smtClean="0">
                           <a:latin typeface="Cambria Math" panose="02040503050406030204" pitchFamily="18" charset="0"/>
                         </a:rPr>
-                        <m:t>1+2+…</m:t>
+                        <m:t>1+2+…+</m:t>
                       </m:r>
                       <m:d>
                         <m:dPr>
@@ -20416,7 +20416,7 @@
                 </a14:m>
                 <a:r>
                   <a:rPr lang="en-GB" dirty="0"/>
-                  <a:t> - Sum of all completion times (Overall Processing Time).</a:t>
+                  <a:t> - Sum of all completion times (total completion time).</a:t>
                 </a:r>
               </a:p>
               <a:p>
@@ -21721,7 +21721,7 @@
                 </a14:m>
                 <a:r>
                   <a:rPr lang="en-GB" dirty="0"/>
-                  <a:t> a vector of similar length of no specific order. The minimum scalar product of </a:t>
+                  <a:t> a vector of the same length of no specific order. The minimum scalar product of </a:t>
                 </a:r>
                 <a14:m>
                   <m:oMath xmlns:m="http://schemas.openxmlformats.org/officeDocument/2006/math">

--- a/content/Lectures/Semester 1/Week 07 - Flow Shop and Job Shop Scheduling/5 Source Files/Week 7 - Flow Shop Scheduling.pptx
+++ b/content/Lectures/Semester 1/Week 07 - Flow Shop and Job Shop Scheduling/5 Source Files/Week 7 - Flow Shop Scheduling.pptx
@@ -11202,7 +11202,7 @@
             </a:r>
             <a:r>
               <a:rPr lang="en-GB" dirty="0"/>
-              <a:t>problems (in general, from 3 machines on)</a:t>
+              <a:t>problems</a:t>
             </a:r>
           </a:p>
           <a:p>
